--- a/docs/PPT/Agent评测_v6.3.pptx
+++ b/docs/PPT/Agent评测_v6.3.pptx
@@ -9353,9 +9353,9 @@
         <p:grpSpPr>
           <a:xfrm>
             <a:off x="6286500" y="3829050"/>
-            <a:ext cx="5413646" cy="1905000"/>
+            <a:ext cx="5143500" cy="1905000"/>
             <a:chOff x="6286500" y="3829050"/>
-            <a:chExt cx="5413646" cy="1905000"/>
+            <a:chExt cx="5143500" cy="1905000"/>
           </a:xfrm>
         </p:grpSpPr>
         <p:sp>
@@ -9522,86 +9522,6 @@
                   <a:cs typeface="+mn-cs"/>
                 </a:rPr>
                 <a:t>timeout 2.7–13.1 分钟分散，同一任务时好时坏）</a:t>
-              </a:r>
-            </a:p>
-          </p:txBody>
-        </p:sp>
-        <p:sp>
-          <p:nvSpPr>
-            <p:cNvPr id="50" name="TextBox 50"/>
-            <p:cNvSpPr txBox="1"/>
-            <p:nvPr/>
-          </p:nvSpPr>
-          <p:spPr>
-            <a:xfrm>
-              <a:off x="6566154" y="4705532"/>
-              <a:ext cx="5133992" cy="234696"/>
-            </a:xfrm>
-            <a:prstGeom prst="rect">
-              <a:avLst/>
-            </a:prstGeom>
-            <a:noFill/>
-            <a:ln>
-              <a:noFill/>
-            </a:ln>
-          </p:spPr>
-          <p:txBody>
-            <a:bodyPr wrap="none" lIns="0" tIns="0" rIns="0" bIns="0" anchor="t" anchorCtr="0">
-              <a:spAutoFit/>
-            </a:bodyPr>
-            <a:lstStyle/>
-            <a:p>
-              <a:pPr algn="l"/>
-              <a:r>
-                <a:rPr lang="zh-CN" sz="1200" dirty="0">
-                  <a:solidFill>
-                    <a:schemeClr val="dk1"/>
-                  </a:solidFill>
-                  <a:latin typeface="+mn-lt"/>
-                  <a:ea typeface="+mn-ea"/>
-                  <a:cs typeface="+mn-cs"/>
-                </a:rPr>
-                <a:t>maxTokens 截断为辅：5.28 不识别 length，截断的 toolCall 仍被执行</a:t>
-              </a:r>
-            </a:p>
-          </p:txBody>
-        </p:sp>
-        <p:sp>
-          <p:nvSpPr>
-            <p:cNvPr id="51" name="TextBox 51"/>
-            <p:cNvSpPr txBox="1"/>
-            <p:nvPr/>
-          </p:nvSpPr>
-          <p:spPr>
-            <a:xfrm>
-              <a:off x="6566154" y="4953182"/>
-              <a:ext cx="4454652" cy="234696"/>
-            </a:xfrm>
-            <a:prstGeom prst="rect">
-              <a:avLst/>
-            </a:prstGeom>
-            <a:noFill/>
-            <a:ln>
-              <a:noFill/>
-            </a:ln>
-          </p:spPr>
-          <p:txBody>
-            <a:bodyPr wrap="none" lIns="0" tIns="0" rIns="0" bIns="0" anchor="t" anchorCtr="0">
-              <a:spAutoFit/>
-            </a:bodyPr>
-            <a:lstStyle/>
-            <a:p>
-              <a:pPr algn="l"/>
-              <a:r>
-                <a:rPr lang="zh-CN" sz="1200" dirty="0">
-                  <a:solidFill>
-                    <a:schemeClr val="dk2"/>
-                  </a:solidFill>
-                  <a:latin typeface="+mn-lt"/>
-                  <a:ea typeface="+mn-ea"/>
-                  <a:cs typeface="+mn-cs"/>
-                </a:rPr>
-                <a:t>官方 issue：#63210 · #97140（v2026.6.10 修复）· #70033</a:t>
               </a:r>
             </a:p>
           </p:txBody>
@@ -9873,7 +9793,7 @@
             <a:graphicData uri="http://schemas.openxmlformats.org/presentationml/2006/ole">
               <mc:AlternateContent xmlns:mc="http://schemas.openxmlformats.org/markup-compatibility/2006">
                 <mc:Choice xmlns:v="urn:schemas-microsoft-com:vml" Requires="v">
-                  <p:oleObj spid="_x0000_s1032" name="工作表" showAsIcon="1" r:id="rId4" imgW="914400" imgH="787320" progId="Excel.Sheet.12">
+                  <p:oleObj spid="_x0000_s1035" name="工作表" showAsIcon="1" r:id="rId4" imgW="914400" imgH="787320" progId="Excel.Sheet.12">
                     <p:embed/>
                   </p:oleObj>
                 </mc:Choice>
@@ -9996,7 +9916,7 @@
             <a:graphicData uri="http://schemas.openxmlformats.org/presentationml/2006/ole">
               <mc:AlternateContent xmlns:mc="http://schemas.openxmlformats.org/markup-compatibility/2006">
                 <mc:Choice xmlns:v="urn:schemas-microsoft-com:vml" Requires="v">
-                  <p:oleObj spid="_x0000_s1033" name="工作表" showAsIcon="1" r:id="rId6" imgW="914400" imgH="787320" progId="Excel.Sheet.12">
+                  <p:oleObj spid="_x0000_s1036" name="工作表" showAsIcon="1" r:id="rId6" imgW="914400" imgH="787320" progId="Excel.Sheet.12">
                     <p:embed/>
                   </p:oleObj>
                 </mc:Choice>
@@ -10119,7 +10039,7 @@
             <a:graphicData uri="http://schemas.openxmlformats.org/presentationml/2006/ole">
               <mc:AlternateContent xmlns:mc="http://schemas.openxmlformats.org/markup-compatibility/2006">
                 <mc:Choice xmlns:v="urn:schemas-microsoft-com:vml" Requires="v">
-                  <p:oleObj spid="_x0000_s1034" name="工作表" showAsIcon="1" r:id="rId8" imgW="914400" imgH="787320" progId="Excel.Sheet.12">
+                  <p:oleObj spid="_x0000_s1037" name="工作表" showAsIcon="1" r:id="rId8" imgW="914400" imgH="787320" progId="Excel.Sheet.12">
                     <p:embed/>
                   </p:oleObj>
                 </mc:Choice>

--- a/docs/PPT/Agent评测_v6.3.pptx
+++ b/docs/PPT/Agent评测_v6.3.pptx
@@ -122,7 +122,7 @@
   </p:defaultTextStyle>
   <p:extLst>
     <p:ext uri="{EFAFB233-063F-42B5-8137-9DF3F51BA10A}">
-      <p15:sldGuideLst xmlns:p15="http://schemas.microsoft.com/office/powerpoint/2012/main" xmlns="">
+      <p15:sldGuideLst xmlns="" xmlns:p15="http://schemas.microsoft.com/office/powerpoint/2012/main">
         <p15:guide id="1" orient="horz" pos="2160">
           <p15:clr>
             <a:srgbClr val="A4A3A4"/>
@@ -221,7 +221,7 @@
           <a:p>
             <a:fld id="{7928E26E-C721-426D-BD0D-694F8F6A3EA7}" type="datetimeFigureOut">
               <a:rPr lang="zh-CN" altLang="en-US" smtClean="0"/>
-              <a:t>2026/8/7</a:t>
+              <a:t>2026/8/10</a:t>
             </a:fld>
             <a:endParaRPr lang="zh-CN" altLang="en-US"/>
           </a:p>
@@ -649,73 +649,7 @@
           <a:bodyPr/>
           <a:lstStyle/>
           <a:p>
-            <a:r>
-              <a:rPr lang="zh-CN" dirty="0"/>
-              <a:t>13 实战评测案例 - 演讲备注</a:t>
-            </a:r>
-          </a:p>
-          <a:p>
-            <a:endParaRPr lang="en-US" dirty="0"/>
-          </a:p>
-          <a:p>
-            <a:r>
-              <a:rPr lang="zh-CN" dirty="0"/>
-              <a:t>时长建议: 90 秒</a:t>
-            </a:r>
-          </a:p>
-          <a:p>
-            <a:endParaRPr lang="en-US" dirty="0"/>
-          </a:p>
-          <a:p>
-            <a:r>
-              <a:rPr lang="zh-CN" dirty="0"/>
-              <a:t>讲解要点:</a:t>
-            </a:r>
-          </a:p>
-          <a:p>
-            <a:r>
-              <a:rPr lang="zh-CN" dirty="0"/>
-              <a:t>• 这是我们用 PawBench 做的真实评测：同一 LLM（QWen35-397b）下，OpenClaw 框架从 4.14 升级到 5.28，得分从 68.1 / 66.0 / 70.3（平均 0.6774）降到 60.3 / 61.2 / 59.7（平均 0.6144），平均分下降 6.3 分。</a:t>
-            </a:r>
-          </a:p>
-          <a:p>
-            <a:r>
-              <a:rPr lang="zh-CN" dirty="0"/>
-              <a:t>• 关键差异：5.28 的 partialArgs 截断次数高达 2,160（4.14 仅 137，约 15.8 倍）；4.14 错误后能重试恢复 107 次，5.28 恢复 0 次。</a:t>
-            </a:r>
-          </a:p>
-          <a:p>
-            <a:r>
-              <a:rPr lang="zh-CN" dirty="0"/>
-              <a:t>• 根因：5.28 架构调整后，LLM 流截断的 tool call 不重试——官方 PR openclaw/openclaw #87571 确认这是已知架构缺陷（truncated tool call 落入 terminal error，不触发重试级联）。</a:t>
-            </a:r>
-          </a:p>
-          <a:p>
-            <a:r>
-              <a:rPr lang="zh-CN" dirty="0"/>
-              <a:t>• 错误类型：timed out / aborted / Context overflow 各约 30%，其中 Context overflow 在 4.14 从未出现。</a:t>
-            </a:r>
-          </a:p>
-          <a:p>
-            <a:r>
-              <a:rPr lang="zh-CN" dirty="0"/>
-              <a:t>• 结论：版本升级未必带来收益，PawBench 让「Agent 框架迭代」效果可量化、可归因。</a:t>
-            </a:r>
-          </a:p>
-          <a:p>
-            <a:endParaRPr lang="en-US" dirty="0"/>
-          </a:p>
-          <a:p>
-            <a:r>
-              <a:rPr lang="zh-CN" dirty="0"/>
-              <a:t>过渡语:</a:t>
-            </a:r>
-          </a:p>
-          <a:p>
-            <a:r>
-              <a:rPr lang="zh-CN" dirty="0"/>
-              <a:t>这个案例说明，框架升级是好是坏不能凭感觉——最后我们总结一下 PawBench 的核心价值。</a:t>
-            </a:r>
+            <a:endParaRPr lang="zh-CN" dirty="0"/>
           </a:p>
         </p:txBody>
       </p:sp>
@@ -850,7 +784,7 @@
           <a:p>
             <a:fld id="{5BCAD085-E8A6-8845-BD4E-CB4CCA059FC4}" type="datetimeFigureOut">
               <a:rPr lang="en-US" smtClean="0"/>
-              <a:t>8/7/2026</a:t>
+              <a:t>8/10/2026</a:t>
             </a:fld>
             <a:endParaRPr lang="en-US"/>
           </a:p>
@@ -963,7 +897,7 @@
           <a:p>
             <a:fld id="{5BCAD085-E8A6-8845-BD4E-CB4CCA059FC4}" type="datetimeFigureOut">
               <a:rPr lang="en-US" smtClean="0"/>
-              <a:t>8/7/2026</a:t>
+              <a:t>8/10/2026</a:t>
             </a:fld>
             <a:endParaRPr lang="en-US"/>
           </a:p>
@@ -4442,28 +4376,28 @@
                 <a:gridCol w="1626242">
                   <a:extLst>
                     <a:ext uri="{9D8B030D-6E8A-4147-A177-3AD203B41FA5}">
-                      <a16:colId xmlns:a16="http://schemas.microsoft.com/office/drawing/2014/main" xmlns="" val="20000"/>
+                      <a16:colId xmlns="" xmlns:a16="http://schemas.microsoft.com/office/drawing/2014/main" val="20000"/>
                     </a:ext>
                   </a:extLst>
                 </a:gridCol>
                 <a:gridCol w="2611843">
                   <a:extLst>
                     <a:ext uri="{9D8B030D-6E8A-4147-A177-3AD203B41FA5}">
-                      <a16:colId xmlns:a16="http://schemas.microsoft.com/office/drawing/2014/main" xmlns="" val="20001"/>
+                      <a16:colId xmlns="" xmlns:a16="http://schemas.microsoft.com/office/drawing/2014/main" val="20001"/>
                     </a:ext>
                   </a:extLst>
                 </a:gridCol>
                 <a:gridCol w="3006084">
                   <a:extLst>
                     <a:ext uri="{9D8B030D-6E8A-4147-A177-3AD203B41FA5}">
-                      <a16:colId xmlns:a16="http://schemas.microsoft.com/office/drawing/2014/main" xmlns="" val="20002"/>
+                      <a16:colId xmlns="" xmlns:a16="http://schemas.microsoft.com/office/drawing/2014/main" val="20002"/>
                     </a:ext>
                   </a:extLst>
                 </a:gridCol>
                 <a:gridCol w="4188805">
                   <a:extLst>
                     <a:ext uri="{9D8B030D-6E8A-4147-A177-3AD203B41FA5}">
-                      <a16:colId xmlns:a16="http://schemas.microsoft.com/office/drawing/2014/main" xmlns="" val="20003"/>
+                      <a16:colId xmlns="" xmlns:a16="http://schemas.microsoft.com/office/drawing/2014/main" val="20003"/>
                     </a:ext>
                   </a:extLst>
                 </a:gridCol>
@@ -4595,7 +4529,7 @@
                 </a:tc>
                 <a:extLst>
                   <a:ext uri="{0D108BD9-81ED-4DB2-BD59-A6C34878D82A}">
-                    <a16:rowId xmlns:a16="http://schemas.microsoft.com/office/drawing/2014/main" xmlns="" val="10000"/>
+                    <a16:rowId xmlns="" xmlns:a16="http://schemas.microsoft.com/office/drawing/2014/main" val="10000"/>
                   </a:ext>
                 </a:extLst>
               </a:tr>
@@ -4701,7 +4635,7 @@
                 </a:tc>
                 <a:extLst>
                   <a:ext uri="{0D108BD9-81ED-4DB2-BD59-A6C34878D82A}">
-                    <a16:rowId xmlns:a16="http://schemas.microsoft.com/office/drawing/2014/main" xmlns="" val="10001"/>
+                    <a16:rowId xmlns="" xmlns:a16="http://schemas.microsoft.com/office/drawing/2014/main" val="10001"/>
                   </a:ext>
                 </a:extLst>
               </a:tr>
@@ -4810,7 +4744,7 @@
                 </a:tc>
                 <a:extLst>
                   <a:ext uri="{0D108BD9-81ED-4DB2-BD59-A6C34878D82A}">
-                    <a16:rowId xmlns:a16="http://schemas.microsoft.com/office/drawing/2014/main" xmlns="" val="10002"/>
+                    <a16:rowId xmlns="" xmlns:a16="http://schemas.microsoft.com/office/drawing/2014/main" val="10002"/>
                   </a:ext>
                 </a:extLst>
               </a:tr>
@@ -4936,7 +4870,7 @@
                 </a:tc>
                 <a:extLst>
                   <a:ext uri="{0D108BD9-81ED-4DB2-BD59-A6C34878D82A}">
-                    <a16:rowId xmlns:a16="http://schemas.microsoft.com/office/drawing/2014/main" xmlns="" val="10003"/>
+                    <a16:rowId xmlns="" xmlns:a16="http://schemas.microsoft.com/office/drawing/2014/main" val="10003"/>
                   </a:ext>
                 </a:extLst>
               </a:tr>
@@ -5056,7 +4990,7 @@
                 </a:tc>
                 <a:extLst>
                   <a:ext uri="{0D108BD9-81ED-4DB2-BD59-A6C34878D82A}">
-                    <a16:rowId xmlns:a16="http://schemas.microsoft.com/office/drawing/2014/main" xmlns="" val="10004"/>
+                    <a16:rowId xmlns="" xmlns:a16="http://schemas.microsoft.com/office/drawing/2014/main" val="10004"/>
                   </a:ext>
                 </a:extLst>
               </a:tr>
@@ -5165,7 +5099,7 @@
                 </a:tc>
                 <a:extLst>
                   <a:ext uri="{0D108BD9-81ED-4DB2-BD59-A6C34878D82A}">
-                    <a16:rowId xmlns:a16="http://schemas.microsoft.com/office/drawing/2014/main" xmlns="" val="10005"/>
+                    <a16:rowId xmlns="" xmlns:a16="http://schemas.microsoft.com/office/drawing/2014/main" val="10005"/>
                   </a:ext>
                 </a:extLst>
               </a:tr>
@@ -5281,7 +5215,7 @@
                 </a:tc>
                 <a:extLst>
                   <a:ext uri="{0D108BD9-81ED-4DB2-BD59-A6C34878D82A}">
-                    <a16:rowId xmlns:a16="http://schemas.microsoft.com/office/drawing/2014/main" xmlns="" val="10006"/>
+                    <a16:rowId xmlns="" xmlns:a16="http://schemas.microsoft.com/office/drawing/2014/main" val="10006"/>
                   </a:ext>
                 </a:extLst>
               </a:tr>
@@ -5387,7 +5321,7 @@
                 </a:tc>
                 <a:extLst>
                   <a:ext uri="{0D108BD9-81ED-4DB2-BD59-A6C34878D82A}">
-                    <a16:rowId xmlns:a16="http://schemas.microsoft.com/office/drawing/2014/main" xmlns="" val="10007"/>
+                    <a16:rowId xmlns="" xmlns:a16="http://schemas.microsoft.com/office/drawing/2014/main" val="10007"/>
                   </a:ext>
                 </a:extLst>
               </a:tr>
@@ -5493,7 +5427,7 @@
                 </a:tc>
                 <a:extLst>
                   <a:ext uri="{0D108BD9-81ED-4DB2-BD59-A6C34878D82A}">
-                    <a16:rowId xmlns:a16="http://schemas.microsoft.com/office/drawing/2014/main" xmlns="" val="10008"/>
+                    <a16:rowId xmlns="" xmlns:a16="http://schemas.microsoft.com/office/drawing/2014/main" val="10008"/>
                   </a:ext>
                 </a:extLst>
               </a:tr>
@@ -9708,16 +9642,16 @@
       </p:sp>
       <p:grpSp>
         <p:nvGrpSpPr>
-          <p:cNvPr id="64" name="组合 63"/>
+          <p:cNvPr id="4" name="组合 3"/>
           <p:cNvGrpSpPr/>
           <p:nvPr/>
         </p:nvGrpSpPr>
         <p:grpSpPr>
           <a:xfrm>
             <a:off x="1041654" y="5490210"/>
-            <a:ext cx="956993" cy="901583"/>
+            <a:ext cx="956993" cy="868906"/>
             <a:chOff x="1041654" y="5490210"/>
-            <a:chExt cx="956993" cy="901583"/>
+            <a:chExt cx="956993" cy="868906"/>
           </a:xfrm>
         </p:grpSpPr>
         <p:sp>
@@ -9780,20 +9714,20 @@
             <p:nvPr>
               <p:extLst>
                 <p:ext uri="{D42A27DB-BD31-4B8C-83A1-F6EECF244321}">
-                  <p14:modId xmlns:p14="http://schemas.microsoft.com/office/powerpoint/2010/main" val="2213376804"/>
+                  <p14:modId xmlns:p14="http://schemas.microsoft.com/office/powerpoint/2010/main" val="1019859076"/>
                 </p:ext>
               </p:extLst>
             </p:nvPr>
           </p:nvGraphicFramePr>
           <p:xfrm>
-            <a:off x="1138235" y="5734050"/>
+            <a:off x="1138235" y="5701373"/>
             <a:ext cx="763830" cy="657743"/>
           </p:xfrm>
           <a:graphic>
             <a:graphicData uri="http://schemas.openxmlformats.org/presentationml/2006/ole">
               <mc:AlternateContent xmlns:mc="http://schemas.openxmlformats.org/markup-compatibility/2006">
                 <mc:Choice xmlns:v="urn:schemas-microsoft-com:vml" Requires="v">
-                  <p:oleObj spid="_x0000_s1035" name="工作表" showAsIcon="1" r:id="rId4" imgW="914400" imgH="787320" progId="Excel.Sheet.12">
+                  <p:oleObj spid="_x0000_s1053" name="工作表" showAsIcon="1" r:id="rId4" imgW="914400" imgH="787320" progId="Excel.Sheet.12">
                     <p:embed/>
                   </p:oleObj>
                 </mc:Choice>
@@ -9814,7 +9748,7 @@
                       </p:blipFill>
                       <p:spPr>
                         <a:xfrm>
-                          <a:off x="1138235" y="5734050"/>
+                          <a:off x="1138235" y="5701373"/>
                           <a:ext cx="763830" cy="657743"/>
                         </a:xfrm>
                         <a:prstGeom prst="rect">
@@ -9831,16 +9765,139 @@
       </p:grpSp>
       <p:grpSp>
         <p:nvGrpSpPr>
-          <p:cNvPr id="66" name="组合 65"/>
+          <p:cNvPr id="2" name="组合 1"/>
           <p:cNvGrpSpPr/>
           <p:nvPr/>
         </p:nvGrpSpPr>
         <p:grpSpPr>
           <a:xfrm>
-            <a:off x="4498295" y="5490210"/>
-            <a:ext cx="923330" cy="901583"/>
-            <a:chOff x="4498295" y="5490210"/>
-            <a:chExt cx="923330" cy="901583"/>
+            <a:off x="2758221" y="5490210"/>
+            <a:ext cx="956993" cy="901583"/>
+            <a:chOff x="2769975" y="5490210"/>
+            <a:chExt cx="956993" cy="901583"/>
+          </a:xfrm>
+        </p:grpSpPr>
+        <p:graphicFrame>
+          <p:nvGraphicFramePr>
+            <p:cNvPr id="62" name="对象 61"/>
+            <p:cNvGraphicFramePr>
+              <a:graphicFrameLocks noChangeAspect="1"/>
+            </p:cNvGraphicFramePr>
+            <p:nvPr>
+              <p:extLst>
+                <p:ext uri="{D42A27DB-BD31-4B8C-83A1-F6EECF244321}">
+                  <p14:modId xmlns:p14="http://schemas.microsoft.com/office/powerpoint/2010/main" val="1761184637"/>
+                </p:ext>
+              </p:extLst>
+            </p:nvPr>
+          </p:nvGraphicFramePr>
+          <p:xfrm>
+            <a:off x="2847582" y="5701373"/>
+            <a:ext cx="801778" cy="690420"/>
+          </p:xfrm>
+          <a:graphic>
+            <a:graphicData uri="http://schemas.openxmlformats.org/presentationml/2006/ole">
+              <mc:AlternateContent xmlns:mc="http://schemas.openxmlformats.org/markup-compatibility/2006">
+                <mc:Choice xmlns:v="urn:schemas-microsoft-com:vml" Requires="v">
+                  <p:oleObj spid="_x0000_s1054" name="工作表" showAsIcon="1" r:id="rId6" imgW="914400" imgH="787320" progId="Excel.Sheet.12">
+                    <p:embed/>
+                  </p:oleObj>
+                </mc:Choice>
+                <mc:Fallback>
+                  <p:oleObj name="工作表" showAsIcon="1" r:id="rId6" imgW="914400" imgH="787320" progId="Excel.Sheet.12">
+                    <p:embed/>
+                    <p:pic>
+                      <p:nvPicPr>
+                        <p:cNvPr id="0" name=""/>
+                        <p:cNvPicPr/>
+                        <p:nvPr/>
+                      </p:nvPicPr>
+                      <p:blipFill>
+                        <a:blip r:embed="rId7"/>
+                        <a:stretch>
+                          <a:fillRect/>
+                        </a:stretch>
+                      </p:blipFill>
+                      <p:spPr>
+                        <a:xfrm>
+                          <a:off x="2847582" y="5701373"/>
+                          <a:ext cx="801778" cy="690420"/>
+                        </a:xfrm>
+                        <a:prstGeom prst="rect">
+                          <a:avLst/>
+                        </a:prstGeom>
+                      </p:spPr>
+                    </p:pic>
+                  </p:oleObj>
+                </mc:Fallback>
+              </mc:AlternateContent>
+            </a:graphicData>
+          </a:graphic>
+        </p:graphicFrame>
+        <p:sp>
+          <p:nvSpPr>
+            <p:cNvPr id="38" name="TextBox 38"/>
+            <p:cNvSpPr txBox="1"/>
+            <p:nvPr/>
+          </p:nvSpPr>
+          <p:spPr>
+            <a:xfrm>
+              <a:off x="2769975" y="5490210"/>
+              <a:ext cx="956993" cy="184666"/>
+            </a:xfrm>
+            <a:prstGeom prst="rect">
+              <a:avLst/>
+            </a:prstGeom>
+            <a:noFill/>
+            <a:ln>
+              <a:noFill/>
+            </a:ln>
+          </p:spPr>
+          <p:txBody>
+            <a:bodyPr wrap="none" lIns="0" tIns="0" rIns="0" bIns="0" anchor="t" anchorCtr="0">
+              <a:spAutoFit/>
+            </a:bodyPr>
+            <a:lstStyle/>
+            <a:p>
+              <a:pPr algn="l"/>
+              <a:r>
+                <a:rPr lang="zh-CN" sz="1200" dirty="0" smtClean="0">
+                  <a:solidFill>
+                    <a:schemeClr val="dk2"/>
+                  </a:solidFill>
+                  <a:latin typeface="+mn-lt"/>
+                  <a:ea typeface="+mn-ea"/>
+                  <a:cs typeface="+mn-cs"/>
+                </a:rPr>
+                <a:t>5</a:t>
+              </a:r>
+              <a:r>
+                <a:rPr lang="zh-CN" sz="1200" dirty="0">
+                  <a:solidFill>
+                    <a:schemeClr val="dk2"/>
+                  </a:solidFill>
+                  <a:latin typeface="+mn-lt"/>
+                  <a:ea typeface="+mn-ea"/>
+                  <a:cs typeface="+mn-cs"/>
+                </a:rPr>
+                <a:t>.28 得分分析</a:t>
+              </a:r>
+            </a:p>
+          </p:txBody>
+        </p:sp>
+      </p:grpSp>
+      <p:grpSp>
+        <p:nvGrpSpPr>
+          <p:cNvPr id="3" name="组合 2"/>
+          <p:cNvGrpSpPr/>
+          <p:nvPr/>
+        </p:nvGrpSpPr>
+        <p:grpSpPr>
+          <a:xfrm>
+            <a:off x="4474789" y="5490210"/>
+            <a:ext cx="923330" cy="850032"/>
+            <a:chOff x="4474789" y="5490210"/>
+            <a:chExt cx="923330" cy="850032"/>
           </a:xfrm>
         </p:grpSpPr>
         <p:sp>
@@ -9851,7 +9908,7 @@
           </p:nvSpPr>
           <p:spPr>
             <a:xfrm>
-              <a:off x="4498295" y="5490210"/>
+              <a:off x="4474789" y="5490210"/>
               <a:ext cx="923330" cy="184666"/>
             </a:xfrm>
             <a:prstGeom prst="rect">
@@ -9896,129 +9953,6 @@
         </p:sp>
         <p:graphicFrame>
           <p:nvGraphicFramePr>
-            <p:cNvPr id="62" name="对象 61"/>
-            <p:cNvGraphicFramePr>
-              <a:graphicFrameLocks noChangeAspect="1"/>
-            </p:cNvGraphicFramePr>
-            <p:nvPr>
-              <p:extLst>
-                <p:ext uri="{D42A27DB-BD31-4B8C-83A1-F6EECF244321}">
-                  <p14:modId xmlns:p14="http://schemas.microsoft.com/office/powerpoint/2010/main" val="3722940275"/>
-                </p:ext>
-              </p:extLst>
-            </p:nvPr>
-          </p:nvGraphicFramePr>
-          <p:xfrm>
-            <a:off x="4559071" y="5701373"/>
-            <a:ext cx="801778" cy="690420"/>
-          </p:xfrm>
-          <a:graphic>
-            <a:graphicData uri="http://schemas.openxmlformats.org/presentationml/2006/ole">
-              <mc:AlternateContent xmlns:mc="http://schemas.openxmlformats.org/markup-compatibility/2006">
-                <mc:Choice xmlns:v="urn:schemas-microsoft-com:vml" Requires="v">
-                  <p:oleObj spid="_x0000_s1036" name="工作表" showAsIcon="1" r:id="rId6" imgW="914400" imgH="787320" progId="Excel.Sheet.12">
-                    <p:embed/>
-                  </p:oleObj>
-                </mc:Choice>
-                <mc:Fallback>
-                  <p:oleObj name="工作表" showAsIcon="1" r:id="rId6" imgW="914400" imgH="787320" progId="Excel.Sheet.12">
-                    <p:embed/>
-                    <p:pic>
-                      <p:nvPicPr>
-                        <p:cNvPr id="0" name=""/>
-                        <p:cNvPicPr/>
-                        <p:nvPr/>
-                      </p:nvPicPr>
-                      <p:blipFill>
-                        <a:blip r:embed="rId7"/>
-                        <a:stretch>
-                          <a:fillRect/>
-                        </a:stretch>
-                      </p:blipFill>
-                      <p:spPr>
-                        <a:xfrm>
-                          <a:off x="4559071" y="5701373"/>
-                          <a:ext cx="801778" cy="690420"/>
-                        </a:xfrm>
-                        <a:prstGeom prst="rect">
-                          <a:avLst/>
-                        </a:prstGeom>
-                      </p:spPr>
-                    </p:pic>
-                  </p:oleObj>
-                </mc:Fallback>
-              </mc:AlternateContent>
-            </a:graphicData>
-          </a:graphic>
-        </p:graphicFrame>
-      </p:grpSp>
-      <p:grpSp>
-        <p:nvGrpSpPr>
-          <p:cNvPr id="65" name="组合 64"/>
-          <p:cNvGrpSpPr/>
-          <p:nvPr/>
-        </p:nvGrpSpPr>
-        <p:grpSpPr>
-          <a:xfrm>
-            <a:off x="2769975" y="5490210"/>
-            <a:ext cx="956993" cy="901583"/>
-            <a:chOff x="2747931" y="5490210"/>
-            <a:chExt cx="956993" cy="901583"/>
-          </a:xfrm>
-        </p:grpSpPr>
-        <p:sp>
-          <p:nvSpPr>
-            <p:cNvPr id="38" name="TextBox 38"/>
-            <p:cNvSpPr txBox="1"/>
-            <p:nvPr/>
-          </p:nvSpPr>
-          <p:spPr>
-            <a:xfrm>
-              <a:off x="2747931" y="5490210"/>
-              <a:ext cx="956993" cy="184666"/>
-            </a:xfrm>
-            <a:prstGeom prst="rect">
-              <a:avLst/>
-            </a:prstGeom>
-            <a:noFill/>
-            <a:ln>
-              <a:noFill/>
-            </a:ln>
-          </p:spPr>
-          <p:txBody>
-            <a:bodyPr wrap="none" lIns="0" tIns="0" rIns="0" bIns="0" anchor="t" anchorCtr="0">
-              <a:spAutoFit/>
-            </a:bodyPr>
-            <a:lstStyle/>
-            <a:p>
-              <a:pPr algn="l"/>
-              <a:r>
-                <a:rPr lang="zh-CN" sz="1200" dirty="0" smtClean="0">
-                  <a:solidFill>
-                    <a:schemeClr val="dk2"/>
-                  </a:solidFill>
-                  <a:latin typeface="+mn-lt"/>
-                  <a:ea typeface="+mn-ea"/>
-                  <a:cs typeface="+mn-cs"/>
-                </a:rPr>
-                <a:t>5</a:t>
-              </a:r>
-              <a:r>
-                <a:rPr lang="zh-CN" sz="1200" dirty="0">
-                  <a:solidFill>
-                    <a:schemeClr val="dk2"/>
-                  </a:solidFill>
-                  <a:latin typeface="+mn-lt"/>
-                  <a:ea typeface="+mn-ea"/>
-                  <a:cs typeface="+mn-cs"/>
-                </a:rPr>
-                <a:t>.28 得分分析</a:t>
-              </a:r>
-            </a:p>
-          </p:txBody>
-        </p:sp>
-        <p:graphicFrame>
-          <p:nvGraphicFramePr>
             <p:cNvPr id="63" name="对象 62"/>
             <p:cNvGraphicFramePr>
               <a:graphicFrameLocks noChangeAspect="1"/>
@@ -10026,20 +9960,20 @@
             <p:nvPr>
               <p:extLst>
                 <p:ext uri="{D42A27DB-BD31-4B8C-83A1-F6EECF244321}">
-                  <p14:modId xmlns:p14="http://schemas.microsoft.com/office/powerpoint/2010/main" val="869812166"/>
+                  <p14:modId xmlns:p14="http://schemas.microsoft.com/office/powerpoint/2010/main" val="244241598"/>
                 </p:ext>
               </p:extLst>
             </p:nvPr>
           </p:nvGraphicFramePr>
           <p:xfrm>
-            <a:off x="2855471" y="5752924"/>
+            <a:off x="4565498" y="5701373"/>
             <a:ext cx="741912" cy="638869"/>
           </p:xfrm>
           <a:graphic>
             <a:graphicData uri="http://schemas.openxmlformats.org/presentationml/2006/ole">
               <mc:AlternateContent xmlns:mc="http://schemas.openxmlformats.org/markup-compatibility/2006">
                 <mc:Choice xmlns:v="urn:schemas-microsoft-com:vml" Requires="v">
-                  <p:oleObj spid="_x0000_s1037" name="工作表" showAsIcon="1" r:id="rId8" imgW="914400" imgH="787320" progId="Excel.Sheet.12">
+                  <p:oleObj spid="_x0000_s1055" name="工作表" showAsIcon="1" r:id="rId8" imgW="914400" imgH="787320" progId="Excel.Sheet.12">
                     <p:embed/>
                   </p:oleObj>
                 </mc:Choice>
@@ -10060,7 +9994,7 @@
                       </p:blipFill>
                       <p:spPr>
                         <a:xfrm>
-                          <a:off x="2855471" y="5752924"/>
+                          <a:off x="4565498" y="5701373"/>
                           <a:ext cx="741912" cy="638869"/>
                         </a:xfrm>
                         <a:prstGeom prst="rect">
@@ -13261,7 +13195,7 @@
           <p:spPr>
             <a:xfrm>
               <a:off x="1155192" y="3054668"/>
-              <a:ext cx="2873085" cy="264033"/>
+              <a:ext cx="2943178" cy="207749"/>
             </a:xfrm>
             <a:prstGeom prst="rect">
               <a:avLst/>
@@ -13277,7 +13211,17 @@
             </a:bodyPr>
             <a:lstStyle/>
             <a:p>
-              <a:pPr algn="l"/>
+              <a:r>
+                <a:rPr lang="en-US" sz="1350" b="1" dirty="0" smtClean="0">
+                  <a:solidFill>
+                    <a:schemeClr val="accent2"/>
+                  </a:solidFill>
+                  <a:latin typeface="+mn-lt"/>
+                  <a:ea typeface="+mn-ea"/>
+                  <a:cs typeface="+mn-cs"/>
+                </a:rPr>
+                <a:t>SWE-bench </a:t>
+              </a:r>
               <a:r>
                 <a:rPr lang="en-US" sz="1350" b="1" dirty="0">
                   <a:solidFill>
@@ -13287,8 +13231,43 @@
                   <a:ea typeface="+mn-ea"/>
                   <a:cs typeface="+mn-cs"/>
                 </a:rPr>
-                <a:t>τ-bench / SWE-bench / AppWorld</a:t>
+                <a:t>/ </a:t>
               </a:r>
+              <a:r>
+                <a:rPr lang="en-US" sz="1350" b="1" dirty="0" err="1" smtClean="0">
+                  <a:solidFill>
+                    <a:schemeClr val="accent2"/>
+                  </a:solidFill>
+                  <a:latin typeface="+mn-lt"/>
+                  <a:ea typeface="+mn-ea"/>
+                  <a:cs typeface="+mn-cs"/>
+                </a:rPr>
+                <a:t>AppWorld</a:t>
+              </a:r>
+              <a:r>
+                <a:rPr lang="en-US" altLang="zh-CN" sz="1350" b="1" dirty="0">
+                  <a:solidFill>
+                    <a:schemeClr val="accent2"/>
+                  </a:solidFill>
+                </a:rPr>
+                <a:t> / </a:t>
+              </a:r>
+              <a:r>
+                <a:rPr lang="en-US" altLang="zh-CN" sz="1350" b="1" dirty="0" err="1" smtClean="0">
+                  <a:solidFill>
+                    <a:schemeClr val="accent2"/>
+                  </a:solidFill>
+                </a:rPr>
+                <a:t>PawBench</a:t>
+              </a:r>
+              <a:endParaRPr lang="en-US" sz="1350" b="1" dirty="0">
+                <a:solidFill>
+                  <a:schemeClr val="accent2"/>
+                </a:solidFill>
+                <a:latin typeface="+mn-lt"/>
+                <a:ea typeface="+mn-ea"/>
+                <a:cs typeface="+mn-cs"/>
+              </a:endParaRPr>
             </a:p>
           </p:txBody>
         </p:sp>
@@ -13542,7 +13521,7 @@
           <p:spPr>
             <a:xfrm>
               <a:off x="4850892" y="3054668"/>
-              <a:ext cx="2195721" cy="264033"/>
+              <a:ext cx="1974900" cy="207749"/>
             </a:xfrm>
             <a:prstGeom prst="rect">
               <a:avLst/>
@@ -13558,7 +13537,6 @@
             </a:bodyPr>
             <a:lstStyle/>
             <a:p>
-              <a:pPr algn="l"/>
               <a:r>
                 <a:rPr lang="en-US" sz="1350" b="1" dirty="0">
                   <a:solidFill>
@@ -13568,8 +13546,27 @@
                   <a:ea typeface="+mn-ea"/>
                   <a:cs typeface="+mn-cs"/>
                 </a:rPr>
-                <a:t>LangSmith / AgentEvals</a:t>
+                <a:t>LangSmith / </a:t>
               </a:r>
+              <a:r>
+                <a:rPr lang="en-US" sz="1350" b="1" dirty="0" err="1" smtClean="0">
+                  <a:solidFill>
+                    <a:schemeClr val="accent2"/>
+                  </a:solidFill>
+                  <a:latin typeface="+mn-lt"/>
+                  <a:ea typeface="+mn-ea"/>
+                  <a:cs typeface="+mn-cs"/>
+                </a:rPr>
+                <a:t>AgentEvals</a:t>
+              </a:r>
+              <a:endParaRPr lang="en-US" sz="1350" b="1" dirty="0">
+                <a:solidFill>
+                  <a:schemeClr val="accent2"/>
+                </a:solidFill>
+                <a:latin typeface="+mn-lt"/>
+                <a:ea typeface="+mn-ea"/>
+                <a:cs typeface="+mn-cs"/>
+              </a:endParaRPr>
             </a:p>
           </p:txBody>
         </p:sp>
@@ -13823,7 +13820,7 @@
           <p:spPr>
             <a:xfrm>
               <a:off x="8546592" y="3054668"/>
-              <a:ext cx="2450000" cy="264033"/>
+              <a:ext cx="1894749" cy="207749"/>
             </a:xfrm>
             <a:prstGeom prst="rect">
               <a:avLst/>
@@ -13839,9 +13836,8 @@
             </a:bodyPr>
             <a:lstStyle/>
             <a:p>
-              <a:pPr algn="l"/>
               <a:r>
-                <a:rPr lang="zh-CN" sz="1350" b="1" dirty="0">
+                <a:rPr lang="zh-CN" sz="1350" b="1" dirty="0" smtClean="0">
                   <a:solidFill>
                     <a:schemeClr val="accent2"/>
                   </a:solidFill>
@@ -13849,8 +13845,32 @@
                   <a:ea typeface="+mn-ea"/>
                   <a:cs typeface="+mn-cs"/>
                 </a:rPr>
-                <a:t>Promptfoo / 通用开放任务评测</a:t>
+                <a:t>Promptfoo</a:t>
               </a:r>
+              <a:r>
+                <a:rPr lang="en-US" altLang="zh-CN" sz="1350" b="1" dirty="0">
+                  <a:solidFill>
+                    <a:schemeClr val="accent2"/>
+                  </a:solidFill>
+                </a:rPr>
+                <a:t> / </a:t>
+              </a:r>
+              <a:r>
+                <a:rPr lang="en-US" altLang="zh-CN" sz="1350" b="1" dirty="0" err="1" smtClean="0">
+                  <a:solidFill>
+                    <a:schemeClr val="accent2"/>
+                  </a:solidFill>
+                </a:rPr>
+                <a:t>PawBench</a:t>
+              </a:r>
+              <a:endParaRPr lang="zh-CN" sz="1350" b="1" dirty="0">
+                <a:solidFill>
+                  <a:schemeClr val="accent2"/>
+                </a:solidFill>
+                <a:latin typeface="+mn-lt"/>
+                <a:ea typeface="+mn-ea"/>
+                <a:cs typeface="+mn-cs"/>
+              </a:endParaRPr>
             </a:p>
           </p:txBody>
         </p:sp>
@@ -14666,7 +14686,7 @@
           <p:spPr>
             <a:xfrm>
               <a:off x="8546592" y="5340668"/>
-              <a:ext cx="2531549" cy="264033"/>
+              <a:ext cx="2539221" cy="207749"/>
             </a:xfrm>
             <a:prstGeom prst="rect">
               <a:avLst/>
@@ -14682,7 +14702,6 @@
             </a:bodyPr>
             <a:lstStyle/>
             <a:p>
-              <a:pPr algn="l"/>
               <a:r>
                 <a:rPr lang="en-US" sz="1350" b="1" dirty="0">
                   <a:solidFill>
@@ -14692,8 +14711,54 @@
                   <a:ea typeface="+mn-ea"/>
                   <a:cs typeface="+mn-cs"/>
                 </a:rPr>
-                <a:t>GAIA / WebArena / OSWorld</a:t>
+                <a:t>GAIA / </a:t>
               </a:r>
+              <a:r>
+                <a:rPr lang="en-US" sz="1350" b="1" dirty="0" err="1">
+                  <a:solidFill>
+                    <a:schemeClr val="accent2"/>
+                  </a:solidFill>
+                  <a:latin typeface="+mn-lt"/>
+                  <a:ea typeface="+mn-ea"/>
+                  <a:cs typeface="+mn-cs"/>
+                </a:rPr>
+                <a:t>WebArena</a:t>
+              </a:r>
+              <a:r>
+                <a:rPr lang="en-US" sz="1350" b="1" dirty="0">
+                  <a:solidFill>
+                    <a:schemeClr val="accent2"/>
+                  </a:solidFill>
+                  <a:latin typeface="+mn-lt"/>
+                  <a:ea typeface="+mn-ea"/>
+                  <a:cs typeface="+mn-cs"/>
+                </a:rPr>
+                <a:t> </a:t>
+              </a:r>
+              <a:r>
+                <a:rPr lang="en-US" altLang="zh-CN" sz="1350" b="1" dirty="0" smtClean="0">
+                  <a:solidFill>
+                    <a:schemeClr val="accent2"/>
+                  </a:solidFill>
+                </a:rPr>
+                <a:t>/ </a:t>
+              </a:r>
+              <a:r>
+                <a:rPr lang="en-US" altLang="zh-CN" sz="1350" b="1" dirty="0" err="1">
+                  <a:solidFill>
+                    <a:schemeClr val="accent2"/>
+                  </a:solidFill>
+                </a:rPr>
+                <a:t>PawBench</a:t>
+              </a:r>
+              <a:endParaRPr lang="en-US" sz="1350" b="1" dirty="0">
+                <a:solidFill>
+                  <a:schemeClr val="accent2"/>
+                </a:solidFill>
+                <a:latin typeface="+mn-lt"/>
+                <a:ea typeface="+mn-ea"/>
+                <a:cs typeface="+mn-cs"/>
+              </a:endParaRPr>
             </a:p>
           </p:txBody>
         </p:sp>
